--- a/catalog/samples/title_page.pptx
+++ b/catalog/samples/title_page.pptx
@@ -672,7 +672,7 @@
           </a:p>
           <a:p>
             <a:r>
-              <a:t>  "template_sha256": "97bcbcffe8e022bebf7228ab72dffc51be2532ed78194a5d9ae81a284f5e3ecb"</a:t>
+              <a:t>  "template_sha256": "031f71cd1210744b0311751268a345e5b7bd38372f5072d8d14e582778498bf5"</a:t>
             </a:r>
           </a:p>
           <a:p>
